--- a/public/downloads/TERMIS-AM_2026_PPT.pptx
+++ b/public/downloads/TERMIS-AM_2026_PPT.pptx
@@ -6,7 +6,6 @@
   </p:sldMasterIdLst>
   <p:sldIdLst>
     <p:sldId id="256" r:id="rId2"/>
-    <p:sldId id="257" r:id="rId3"/>
   </p:sldIdLst>
   <p:sldSz cx="12192000" cy="6858000"/>
   <p:notesSz cx="6858000" cy="9144000"/>
@@ -116,7 +115,7 @@
 <file path=ppt/revisionInfo.xml><?xml version="1.0" encoding="utf-8"?>
 <p1510:revInfo xmlns:a="http://schemas.openxmlformats.org/drawingml/2006/main" xmlns:r="http://schemas.openxmlformats.org/officeDocument/2006/relationships" xmlns:p1510="http://schemas.microsoft.com/office/powerpoint/2015/10/main">
   <p1510:revLst>
-    <p1510:client id="{FD47890A-D877-43F5-BA25-E46A90B10720}" v="2" dt="2026-03-13T09:57:02.363"/>
+    <p1510:client id="{64BEC856-07BF-45E1-9EB2-2F407309E05C}" v="1" dt="2026-04-24T10:28:16.349"/>
   </p1510:revLst>
 </p1510:revInfo>
 </file>
@@ -125,48 +124,32 @@
 <pc:chgInfo xmlns:a="http://schemas.openxmlformats.org/drawingml/2006/main" xmlns:r="http://schemas.openxmlformats.org/officeDocument/2006/relationships" xmlns:ac="http://schemas.microsoft.com/office/drawing/2013/main/command" xmlns:pc="http://schemas.microsoft.com/office/powerpoint/2013/main/command">
   <pc:docChgLst>
     <pc:chgData name="Gizem Unsalan" userId="ef893f21-bffb-4ff0-aca7-6d9048fb3440" providerId="ADAL" clId="{4F3CD260-C8EA-4F3D-9E02-BBC7D5F3E512}"/>
-    <pc:docChg chg="custSel addSld delSld modSld">
-      <pc:chgData name="Gizem Unsalan" userId="ef893f21-bffb-4ff0-aca7-6d9048fb3440" providerId="ADAL" clId="{4F3CD260-C8EA-4F3D-9E02-BBC7D5F3E512}" dt="2026-03-13T09:57:17.350" v="57" actId="47"/>
+    <pc:docChg chg="delSld modSld">
+      <pc:chgData name="Gizem Unsalan" userId="ef893f21-bffb-4ff0-aca7-6d9048fb3440" providerId="ADAL" clId="{4F3CD260-C8EA-4F3D-9E02-BBC7D5F3E512}" dt="2026-04-24T10:30:37.069" v="56" actId="1076"/>
       <pc:docMkLst>
         <pc:docMk/>
       </pc:docMkLst>
-      <pc:sldChg chg="addSp modSp mod setBg">
-        <pc:chgData name="Gizem Unsalan" userId="ef893f21-bffb-4ff0-aca7-6d9048fb3440" providerId="ADAL" clId="{4F3CD260-C8EA-4F3D-9E02-BBC7D5F3E512}" dt="2026-03-13T09:56:43.158" v="43" actId="1036"/>
+      <pc:sldChg chg="addSp modSp mod">
+        <pc:chgData name="Gizem Unsalan" userId="ef893f21-bffb-4ff0-aca7-6d9048fb3440" providerId="ADAL" clId="{4F3CD260-C8EA-4F3D-9E02-BBC7D5F3E512}" dt="2026-04-24T10:30:37.069" v="56" actId="1076"/>
+        <pc:sldMkLst>
+          <pc:docMk/>
+          <pc:sldMk cId="27388164" sldId="256"/>
+        </pc:sldMkLst>
+        <pc:spChg chg="add mod">
+          <ac:chgData name="Gizem Unsalan" userId="ef893f21-bffb-4ff0-aca7-6d9048fb3440" providerId="ADAL" clId="{4F3CD260-C8EA-4F3D-9E02-BBC7D5F3E512}" dt="2026-04-24T10:30:37.069" v="56" actId="1076"/>
+          <ac:spMkLst>
+            <pc:docMk/>
+            <pc:sldMk cId="27388164" sldId="256"/>
+            <ac:spMk id="2" creationId="{44C1E5E5-E779-A33F-66D0-B336E1B55B28}"/>
+          </ac:spMkLst>
+        </pc:spChg>
+      </pc:sldChg>
+      <pc:sldChg chg="del">
+        <pc:chgData name="Gizem Unsalan" userId="ef893f21-bffb-4ff0-aca7-6d9048fb3440" providerId="ADAL" clId="{4F3CD260-C8EA-4F3D-9E02-BBC7D5F3E512}" dt="2026-04-24T10:28:02.781" v="0" actId="47"/>
         <pc:sldMkLst>
           <pc:docMk/>
           <pc:sldMk cId="4289421778" sldId="257"/>
         </pc:sldMkLst>
-        <pc:picChg chg="add mod">
-          <ac:chgData name="Gizem Unsalan" userId="ef893f21-bffb-4ff0-aca7-6d9048fb3440" providerId="ADAL" clId="{4F3CD260-C8EA-4F3D-9E02-BBC7D5F3E512}" dt="2026-03-13T09:56:43.158" v="43" actId="1036"/>
-          <ac:picMkLst>
-            <pc:docMk/>
-            <pc:sldMk cId="4289421778" sldId="257"/>
-            <ac:picMk id="3" creationId="{F103CB2B-FCAB-8276-A5E9-3ADF0C0E2189}"/>
-          </ac:picMkLst>
-        </pc:picChg>
-      </pc:sldChg>
-      <pc:sldChg chg="addSp delSp modSp add del mod">
-        <pc:chgData name="Gizem Unsalan" userId="ef893f21-bffb-4ff0-aca7-6d9048fb3440" providerId="ADAL" clId="{4F3CD260-C8EA-4F3D-9E02-BBC7D5F3E512}" dt="2026-03-13T09:57:17.350" v="57" actId="47"/>
-        <pc:sldMkLst>
-          <pc:docMk/>
-          <pc:sldMk cId="2365065283" sldId="258"/>
-        </pc:sldMkLst>
-        <pc:spChg chg="add del mod">
-          <ac:chgData name="Gizem Unsalan" userId="ef893f21-bffb-4ff0-aca7-6d9048fb3440" providerId="ADAL" clId="{4F3CD260-C8EA-4F3D-9E02-BBC7D5F3E512}" dt="2026-03-13T09:57:09.031" v="56" actId="478"/>
-          <ac:spMkLst>
-            <pc:docMk/>
-            <pc:sldMk cId="2365065283" sldId="258"/>
-            <ac:spMk id="2" creationId="{0B11F9FF-AD55-939B-F2CD-EC64EE6FE391}"/>
-          </ac:spMkLst>
-        </pc:spChg>
-        <pc:picChg chg="del">
-          <ac:chgData name="Gizem Unsalan" userId="ef893f21-bffb-4ff0-aca7-6d9048fb3440" providerId="ADAL" clId="{4F3CD260-C8EA-4F3D-9E02-BBC7D5F3E512}" dt="2026-03-13T09:56:50.845" v="45" actId="478"/>
-          <ac:picMkLst>
-            <pc:docMk/>
-            <pc:sldMk cId="2365065283" sldId="258"/>
-            <ac:picMk id="3" creationId="{6AA70491-12D5-FA8F-5661-712FB6687A84}"/>
-          </ac:picMkLst>
-        </pc:picChg>
       </pc:sldChg>
     </pc:docChg>
   </pc:docChgLst>
@@ -320,7 +303,7 @@
           <a:p>
             <a:fld id="{FFAB1FA0-0376-1A44-B172-097B7213E9B5}" type="datetimeFigureOut">
               <a:rPr lang="tr-TR" smtClean="0"/>
-              <a:t>13.03.2026</a:t>
+              <a:t>24.04.2026</a:t>
             </a:fld>
             <a:endParaRPr lang="tr-TR"/>
           </a:p>
@@ -518,7 +501,7 @@
           <a:p>
             <a:fld id="{FFAB1FA0-0376-1A44-B172-097B7213E9B5}" type="datetimeFigureOut">
               <a:rPr lang="tr-TR" smtClean="0"/>
-              <a:t>13.03.2026</a:t>
+              <a:t>24.04.2026</a:t>
             </a:fld>
             <a:endParaRPr lang="tr-TR"/>
           </a:p>
@@ -726,7 +709,7 @@
           <a:p>
             <a:fld id="{FFAB1FA0-0376-1A44-B172-097B7213E9B5}" type="datetimeFigureOut">
               <a:rPr lang="tr-TR" smtClean="0"/>
-              <a:t>13.03.2026</a:t>
+              <a:t>24.04.2026</a:t>
             </a:fld>
             <a:endParaRPr lang="tr-TR"/>
           </a:p>
@@ -924,7 +907,7 @@
           <a:p>
             <a:fld id="{FFAB1FA0-0376-1A44-B172-097B7213E9B5}" type="datetimeFigureOut">
               <a:rPr lang="tr-TR" smtClean="0"/>
-              <a:t>13.03.2026</a:t>
+              <a:t>24.04.2026</a:t>
             </a:fld>
             <a:endParaRPr lang="tr-TR"/>
           </a:p>
@@ -1199,7 +1182,7 @@
           <a:p>
             <a:fld id="{FFAB1FA0-0376-1A44-B172-097B7213E9B5}" type="datetimeFigureOut">
               <a:rPr lang="tr-TR" smtClean="0"/>
-              <a:t>13.03.2026</a:t>
+              <a:t>24.04.2026</a:t>
             </a:fld>
             <a:endParaRPr lang="tr-TR"/>
           </a:p>
@@ -1464,7 +1447,7 @@
           <a:p>
             <a:fld id="{FFAB1FA0-0376-1A44-B172-097B7213E9B5}" type="datetimeFigureOut">
               <a:rPr lang="tr-TR" smtClean="0"/>
-              <a:t>13.03.2026</a:t>
+              <a:t>24.04.2026</a:t>
             </a:fld>
             <a:endParaRPr lang="tr-TR"/>
           </a:p>
@@ -1876,7 +1859,7 @@
           <a:p>
             <a:fld id="{FFAB1FA0-0376-1A44-B172-097B7213E9B5}" type="datetimeFigureOut">
               <a:rPr lang="tr-TR" smtClean="0"/>
-              <a:t>13.03.2026</a:t>
+              <a:t>24.04.2026</a:t>
             </a:fld>
             <a:endParaRPr lang="tr-TR"/>
           </a:p>
@@ -2017,7 +2000,7 @@
           <a:p>
             <a:fld id="{FFAB1FA0-0376-1A44-B172-097B7213E9B5}" type="datetimeFigureOut">
               <a:rPr lang="tr-TR" smtClean="0"/>
-              <a:t>13.03.2026</a:t>
+              <a:t>24.04.2026</a:t>
             </a:fld>
             <a:endParaRPr lang="tr-TR"/>
           </a:p>
@@ -2130,7 +2113,7 @@
           <a:p>
             <a:fld id="{FFAB1FA0-0376-1A44-B172-097B7213E9B5}" type="datetimeFigureOut">
               <a:rPr lang="tr-TR" smtClean="0"/>
-              <a:t>13.03.2026</a:t>
+              <a:t>24.04.2026</a:t>
             </a:fld>
             <a:endParaRPr lang="tr-TR"/>
           </a:p>
@@ -2441,7 +2424,7 @@
           <a:p>
             <a:fld id="{FFAB1FA0-0376-1A44-B172-097B7213E9B5}" type="datetimeFigureOut">
               <a:rPr lang="tr-TR" smtClean="0"/>
-              <a:t>13.03.2026</a:t>
+              <a:t>24.04.2026</a:t>
             </a:fld>
             <a:endParaRPr lang="tr-TR"/>
           </a:p>
@@ -2729,7 +2712,7 @@
           <a:p>
             <a:fld id="{FFAB1FA0-0376-1A44-B172-097B7213E9B5}" type="datetimeFigureOut">
               <a:rPr lang="tr-TR" smtClean="0"/>
-              <a:t>13.03.2026</a:t>
+              <a:t>24.04.2026</a:t>
             </a:fld>
             <a:endParaRPr lang="tr-TR"/>
           </a:p>
@@ -2970,7 +2953,7 @@
           <a:p>
             <a:fld id="{FFAB1FA0-0376-1A44-B172-097B7213E9B5}" type="datetimeFigureOut">
               <a:rPr lang="tr-TR" smtClean="0"/>
-              <a:t>13.03.2026</a:t>
+              <a:t>24.04.2026</a:t>
             </a:fld>
             <a:endParaRPr lang="tr-TR"/>
           </a:p>
@@ -3446,107 +3429,53 @@
           </a:prstGeom>
         </p:spPr>
       </p:pic>
+      <p:sp>
+        <p:nvSpPr>
+          <p:cNvPr id="2" name="TextBox 1">
+            <a:extLst>
+              <a:ext uri="{FF2B5EF4-FFF2-40B4-BE49-F238E27FC236}">
+                <a16:creationId xmlns:a16="http://schemas.microsoft.com/office/drawing/2014/main" id="{44C1E5E5-E779-A33F-66D0-B336E1B55B28}"/>
+              </a:ext>
+            </a:extLst>
+          </p:cNvPr>
+          <p:cNvSpPr txBox="1"/>
+          <p:nvPr/>
+        </p:nvSpPr>
+        <p:spPr>
+          <a:xfrm>
+            <a:off x="2579298" y="5296621"/>
+            <a:ext cx="3347049" cy="523220"/>
+          </a:xfrm>
+          <a:prstGeom prst="rect">
+            <a:avLst/>
+          </a:prstGeom>
+          <a:solidFill>
+            <a:srgbClr val="573862"/>
+          </a:solidFill>
+        </p:spPr>
+        <p:txBody>
+          <a:bodyPr wrap="square" rtlCol="0">
+            <a:spAutoFit/>
+          </a:bodyPr>
+          <a:lstStyle/>
+          <a:p>
+            <a:pPr algn="ctr"/>
+            <a:r>
+              <a:rPr lang="en-US" sz="1400" b="1" dirty="0">
+                <a:solidFill>
+                  <a:schemeClr val="bg1"/>
+                </a:solidFill>
+                <a:latin typeface="Arial Black" panose="020B0A04020102020204" pitchFamily="34" charset="0"/>
+              </a:rPr>
+              <a:t>Abstract Submission Deadline: May 18, 2026</a:t>
+            </a:r>
+          </a:p>
+        </p:txBody>
+      </p:sp>
     </p:spTree>
     <p:extLst>
       <p:ext uri="{BB962C8B-B14F-4D97-AF65-F5344CB8AC3E}">
         <p14:creationId xmlns:p14="http://schemas.microsoft.com/office/powerpoint/2010/main" val="27388164"/>
-      </p:ext>
-    </p:extLst>
-  </p:cSld>
-  <p:clrMapOvr>
-    <a:masterClrMapping/>
-  </p:clrMapOvr>
-</p:sld>
-</file>
-
-<file path=ppt/slides/slide2.xml><?xml version="1.0" encoding="utf-8"?>
-<p:sld xmlns:a="http://schemas.openxmlformats.org/drawingml/2006/main" xmlns:r="http://schemas.openxmlformats.org/officeDocument/2006/relationships" xmlns:p="http://schemas.openxmlformats.org/presentationml/2006/main">
-  <p:cSld>
-    <p:bg>
-      <p:bgPr>
-        <a:solidFill>
-          <a:srgbClr val="E7E7DD"/>
-        </a:solidFill>
-        <a:effectLst/>
-      </p:bgPr>
-    </p:bg>
-    <p:spTree>
-      <p:nvGrpSpPr>
-        <p:cNvPr id="1" name=""/>
-        <p:cNvGrpSpPr/>
-        <p:nvPr/>
-      </p:nvGrpSpPr>
-      <p:grpSpPr>
-        <a:xfrm>
-          <a:off x="0" y="0"/>
-          <a:ext cx="0" cy="0"/>
-          <a:chOff x="0" y="0"/>
-          <a:chExt cx="0" cy="0"/>
-        </a:xfrm>
-      </p:grpSpPr>
-      <p:pic>
-        <p:nvPicPr>
-          <p:cNvPr id="5" name="Resim 4">
-            <a:extLst>
-              <a:ext uri="{FF2B5EF4-FFF2-40B4-BE49-F238E27FC236}">
-                <a16:creationId xmlns:a16="http://schemas.microsoft.com/office/drawing/2014/main" id="{04D56BF6-745D-57EE-4C26-F45319EC60E2}"/>
-              </a:ext>
-            </a:extLst>
-          </p:cNvPr>
-          <p:cNvPicPr>
-            <a:picLocks noChangeAspect="1"/>
-          </p:cNvPicPr>
-          <p:nvPr/>
-        </p:nvPicPr>
-        <p:blipFill>
-          <a:blip r:embed="rId2"/>
-          <a:srcRect/>
-          <a:stretch/>
-        </p:blipFill>
-        <p:spPr>
-          <a:xfrm>
-            <a:off x="5" y="0"/>
-            <a:ext cx="12204619" cy="934588"/>
-          </a:xfrm>
-          <a:prstGeom prst="rect">
-            <a:avLst/>
-          </a:prstGeom>
-        </p:spPr>
-      </p:pic>
-      <p:pic>
-        <p:nvPicPr>
-          <p:cNvPr id="3" name="Picture 2">
-            <a:extLst>
-              <a:ext uri="{FF2B5EF4-FFF2-40B4-BE49-F238E27FC236}">
-                <a16:creationId xmlns:a16="http://schemas.microsoft.com/office/drawing/2014/main" id="{F103CB2B-FCAB-8276-A5E9-3ADF0C0E2189}"/>
-              </a:ext>
-            </a:extLst>
-          </p:cNvPr>
-          <p:cNvPicPr>
-            <a:picLocks noChangeAspect="1"/>
-          </p:cNvPicPr>
-          <p:nvPr/>
-        </p:nvPicPr>
-        <p:blipFill>
-          <a:blip r:embed="rId3"/>
-          <a:stretch>
-            <a:fillRect/>
-          </a:stretch>
-        </p:blipFill>
-        <p:spPr>
-          <a:xfrm>
-            <a:off x="0" y="1280955"/>
-            <a:ext cx="12192000" cy="4466211"/>
-          </a:xfrm>
-          <a:prstGeom prst="rect">
-            <a:avLst/>
-          </a:prstGeom>
-        </p:spPr>
-      </p:pic>
-    </p:spTree>
-    <p:extLst>
-      <p:ext uri="{BB962C8B-B14F-4D97-AF65-F5344CB8AC3E}">
-        <p14:creationId xmlns:p14="http://schemas.microsoft.com/office/powerpoint/2010/main" val="4289421778"/>
       </p:ext>
     </p:extLst>
   </p:cSld>
